--- a/dist/초5/수학/곱셈과어림/초5_수학_곱셈과어림_01_수의범위_학생용.pptx
+++ b/dist/초5/수학/곱셈과어림/초5_수학_곱셈과어림_01_수의범위_학생용.pptx
@@ -120,13 +120,13 @@
   <p:extLst>
     <p:ext uri="{521415D9-36F7-43E2-AB2F-B90AF26B5E84}">
       <p14:sectionLst xmlns:p14="http://schemas.microsoft.com/office/powerpoint/2010/main">
-        <p14:section name="도입" id="{f3165571-8366-1d85-7ba7-1fc393a98a49}">
+        <p14:section name="도입" id="{054baccb-6dd6-c9e3-0a58-2df67cc8226f}">
           <p14:sldIdLst>
             <p14:sldId id="256"/>
             <p14:sldId id="257"/>
           </p14:sldIdLst>
         </p14:section>
-        <p14:section name="개념" id="{82bb6e90-b31b-09d6-1f10-7e2b57a6428d}">
+        <p14:section name="개념" id="{57294dfb-9b13-c1cf-e6fe-d89ede54b558}">
           <p14:sldIdLst>
             <p14:sldId id="258"/>
             <p14:sldId id="259"/>
@@ -135,31 +135,31 @@
             <p14:sldId id="263"/>
           </p14:sldIdLst>
         </p14:section>
-        <p14:section name="연습" id="{e270ad4b-aec1-c654-2d4e-817e4ad6bc89}">
+        <p14:section name="연습" id="{ff1a4bed-8b9f-921b-c056-4a6c79185709}">
           <p14:sldIdLst>
             <p14:sldId id="260"/>
             <p14:sldId id="264"/>
             <p14:sldId id="265"/>
           </p14:sldIdLst>
         </p14:section>
-        <p14:section name="개념" id="{3b91475c-4c3f-ff2a-6860-f3fef089fb4d}">
+        <p14:section name="개념" id="{b06f9eb3-2c0d-a9b7-6bdb-1527e7bf990e}">
           <p14:sldIdLst/>
         </p14:section>
-        <p14:section name="연습" id="{11fde7a9-3a9c-6fe6-8adc-249baf8fc942}">
+        <p14:section name="연습" id="{237daf4c-586a-f3d6-1841-b049959559ad}">
           <p14:sldIdLst/>
         </p14:section>
-        <p14:section name="확인" id="{eb7c15db-2cb1-c91a-6d25-e7c669665693}">
+        <p14:section name="확인" id="{d410497f-17e6-4aad-a0bd-d80a6df8fe19}">
           <p14:sldIdLst>
             <p14:sldId id="266"/>
             <p14:sldId id="267"/>
           </p14:sldIdLst>
         </p14:section>
-        <p14:section name="정리" id="{1f0e90fc-f403-1992-59c0-47961616a610}">
+        <p14:section name="정리" id="{f8b7b6b8-52c6-0fc3-6482-2b5ab858e803}">
           <p14:sldIdLst>
             <p14:sldId id="268"/>
           </p14:sldIdLst>
         </p14:section>
-        <p14:section name="보충" id="{a40af38d-8692-3efb-ba67-9297469cbd5f}">
+        <p14:section name="보충" id="{2835f1bc-bcb7-d733-7c81-9364f2cb8216}">
           <p14:sldIdLst>
             <p14:sldId id="269"/>
           </p14:sldIdLst>
